--- a/output/doc/user-flow-decks/02-publisher-campaign-onboarding-and-update.pptx
+++ b/output/doc/user-flow-decks/02-publisher-campaign-onboarding-and-update.pptx
@@ -3363,7 +3363,7 @@
                 </a:solidFill>
                 <a:latin typeface="Aptos"/>
               </a:rPr>
-              <a:t>Generated: 2026-04-11</a:t>
+              <a:t>Generated: 2026-04-23</a:t>
             </a:r>
           </a:p>
         </p:txBody>
@@ -4129,7 +4129,7 @@
                 </a:solidFill>
                 <a:latin typeface="Aptos"/>
               </a:rPr>
-              <a:t>The campaign update page merges read-only master data with locally editable PE fields.</a:t>
+              <a:t>The campaign update page merges read-only master data with locally editable PE fields and exposes Add/Edit Field Rep outbound buttons.</a:t>
             </a:r>
           </a:p>
           <a:p>
@@ -4421,7 +4421,7 @@
         <p:spPr>
           <a:xfrm>
             <a:off x="749808" y="1097280"/>
-            <a:ext cx="4023360" cy="256032"/>
+            <a:ext cx="3931920" cy="4754880"/>
           </a:xfrm>
           <a:prstGeom prst="rect">
             <a:avLst/>
@@ -4429,12 +4429,19 @@
           <a:noFill/>
         </p:spPr>
         <p:txBody>
-          <a:bodyPr wrap="square" anchor="t">
+          <a:bodyPr wrap="square" lIns="0" rIns="0" tIns="0" bIns="0">
             <a:spAutoFit/>
           </a:bodyPr>
           <a:lstStyle/>
           <a:p>
-            <a:pPr algn="l"/>
+            <a:pPr algn="l">
+              <a:spcBef>
+                <a:spcPts val="0"/>
+              </a:spcBef>
+              <a:spcAft>
+                <a:spcPts val="200"/>
+              </a:spcAft>
+            </a:pPr>
             <a:r>
               <a:rPr sz="1200" b="1">
                 <a:solidFill>
@@ -4445,33 +4452,20 @@
               <a:t>User action</a:t>
             </a:r>
           </a:p>
-        </p:txBody>
-      </p:sp>
-      <p:sp>
-        <p:nvSpPr>
-          <p:cNvPr id="8" name="TextBox 7"/>
-          <p:cNvSpPr txBox="1"/>
-          <p:nvPr/>
-        </p:nvSpPr>
-        <p:spPr>
-          <a:xfrm>
-            <a:off x="749808" y="1353312"/>
-            <a:ext cx="3931920" cy="621792"/>
-          </a:xfrm>
-          <a:prstGeom prst="rect">
-            <a:avLst/>
-          </a:prstGeom>
-          <a:noFill/>
-        </p:spPr>
-        <p:txBody>
-          <a:bodyPr wrap="square" anchor="t">
-            <a:spAutoFit/>
-          </a:bodyPr>
-          <a:lstStyle/>
-          <a:p>
-            <a:pPr algn="l"/>
-            <a:r>
-              <a:rPr sz="1600" b="0">
+          <a:p>
+            <a:pPr algn="l">
+              <a:lnSpc>
+                <a:spcPct val="110000"/>
+              </a:lnSpc>
+              <a:spcBef>
+                <a:spcPts val="0"/>
+              </a:spcBef>
+              <a:spcAft>
+                <a:spcPts val="800"/>
+              </a:spcAft>
+            </a:pPr>
+            <a:r>
+              <a:rPr sz="1300">
                 <a:solidFill>
                   <a:srgbClr val="102A43"/>
                 </a:solidFill>
@@ -4480,31 +4474,15 @@
               <a:t>Launch the partner-provided URL that contains the `campaign-id` and publisher JWT.</a:t>
             </a:r>
           </a:p>
-        </p:txBody>
-      </p:sp>
-      <p:sp>
-        <p:nvSpPr>
-          <p:cNvPr id="9" name="TextBox 8"/>
-          <p:cNvSpPr txBox="1"/>
-          <p:nvPr/>
-        </p:nvSpPr>
-        <p:spPr>
-          <a:xfrm>
-            <a:off x="749808" y="2011680"/>
-            <a:ext cx="4023360" cy="256032"/>
-          </a:xfrm>
-          <a:prstGeom prst="rect">
-            <a:avLst/>
-          </a:prstGeom>
-          <a:noFill/>
-        </p:spPr>
-        <p:txBody>
-          <a:bodyPr wrap="square" anchor="t">
-            <a:spAutoFit/>
-          </a:bodyPr>
-          <a:lstStyle/>
-          <a:p>
-            <a:pPr algn="l"/>
+          <a:p>
+            <a:pPr algn="l">
+              <a:spcBef>
+                <a:spcPts val="0"/>
+              </a:spcBef>
+              <a:spcAft>
+                <a:spcPts val="200"/>
+              </a:spcAft>
+            </a:pPr>
             <a:r>
               <a:rPr sz="1200" b="1">
                 <a:solidFill>
@@ -4515,66 +4493,37 @@
               <a:t>What appears on screen</a:t>
             </a:r>
           </a:p>
-        </p:txBody>
-      </p:sp>
-      <p:sp>
-        <p:nvSpPr>
-          <p:cNvPr id="10" name="TextBox 9"/>
-          <p:cNvSpPr txBox="1"/>
-          <p:nvPr/>
-        </p:nvSpPr>
-        <p:spPr>
-          <a:xfrm>
-            <a:off x="749808" y="2267712"/>
-            <a:ext cx="3931920" cy="713232"/>
-          </a:xfrm>
-          <a:prstGeom prst="rect">
-            <a:avLst/>
-          </a:prstGeom>
-          <a:noFill/>
-        </p:spPr>
-        <p:txBody>
-          <a:bodyPr wrap="square" anchor="t">
-            <a:spAutoFit/>
-          </a:bodyPr>
-          <a:lstStyle/>
-          <a:p>
-            <a:pPr algn="l"/>
-            <a:r>
-              <a:rPr sz="1600" b="0">
+          <a:p>
+            <a:pPr algn="l">
+              <a:lnSpc>
+                <a:spcPct val="110000"/>
+              </a:lnSpc>
+              <a:spcBef>
+                <a:spcPts val="0"/>
+              </a:spcBef>
+              <a:spcAft>
+                <a:spcPts val="800"/>
+              </a:spcAft>
+            </a:pPr>
+            <a:r>
+              <a:rPr sz="1300">
                 <a:solidFill>
                   <a:srgbClr val="102A43"/>
                 </a:solidFill>
                 <a:latin typeface="Aptos"/>
               </a:rPr>
-              <a:t>A minimal publisher landing page confirming the campaign ID and offering the add-details or select-another-campaign actions.</a:t>
-            </a:r>
-          </a:p>
-        </p:txBody>
-      </p:sp>
-      <p:sp>
-        <p:nvSpPr>
-          <p:cNvPr id="11" name="TextBox 10"/>
-          <p:cNvSpPr txBox="1"/>
-          <p:nvPr/>
-        </p:nvSpPr>
-        <p:spPr>
-          <a:xfrm>
-            <a:off x="749808" y="3063240"/>
-            <a:ext cx="4023360" cy="256032"/>
-          </a:xfrm>
-          <a:prstGeom prst="rect">
-            <a:avLst/>
-          </a:prstGeom>
-          <a:noFill/>
-        </p:spPr>
-        <p:txBody>
-          <a:bodyPr wrap="square" anchor="t">
-            <a:spAutoFit/>
-          </a:bodyPr>
-          <a:lstStyle/>
-          <a:p>
-            <a:pPr algn="l"/>
+              <a:t>A minimal publisher landing page confirming the campaign ID and offering the `Add details for this campaign` and `Edit details for any other campaign` actions.</a:t>
+            </a:r>
+          </a:p>
+          <a:p>
+            <a:pPr algn="l">
+              <a:spcBef>
+                <a:spcPts val="0"/>
+              </a:spcBef>
+              <a:spcAft>
+                <a:spcPts val="200"/>
+              </a:spcAft>
+            </a:pPr>
             <a:r>
               <a:rPr sz="1200" b="1">
                 <a:solidFill>
@@ -4585,33 +4534,20 @@
               <a:t>Why it matters</a:t>
             </a:r>
           </a:p>
-        </p:txBody>
-      </p:sp>
-      <p:sp>
-        <p:nvSpPr>
-          <p:cNvPr id="12" name="TextBox 11"/>
-          <p:cNvSpPr txBox="1"/>
-          <p:nvPr/>
-        </p:nvSpPr>
-        <p:spPr>
-          <a:xfrm>
-            <a:off x="749808" y="3319272"/>
-            <a:ext cx="3931920" cy="640080"/>
-          </a:xfrm>
-          <a:prstGeom prst="rect">
-            <a:avLst/>
-          </a:prstGeom>
-          <a:noFill/>
-        </p:spPr>
-        <p:txBody>
-          <a:bodyPr wrap="square" anchor="t">
-            <a:spAutoFit/>
-          </a:bodyPr>
-          <a:lstStyle/>
-          <a:p>
-            <a:pPr algn="l"/>
-            <a:r>
-              <a:rPr sz="1500" b="0">
+          <a:p>
+            <a:pPr algn="l">
+              <a:lnSpc>
+                <a:spcPct val="110000"/>
+              </a:lnSpc>
+              <a:spcBef>
+                <a:spcPts val="0"/>
+              </a:spcBef>
+              <a:spcAft>
+                <a:spcPts val="800"/>
+              </a:spcAft>
+            </a:pPr>
+            <a:r>
+              <a:rPr sz="1300">
                 <a:solidFill>
                   <a:srgbClr val="102A43"/>
                 </a:solidFill>
@@ -4620,31 +4556,15 @@
               <a:t>The signed link is what authorizes a publisher without giving them a normal portal user account.</a:t>
             </a:r>
           </a:p>
-        </p:txBody>
-      </p:sp>
-      <p:sp>
-        <p:nvSpPr>
-          <p:cNvPr id="13" name="TextBox 12"/>
-          <p:cNvSpPr txBox="1"/>
-          <p:nvPr/>
-        </p:nvSpPr>
-        <p:spPr>
-          <a:xfrm>
-            <a:off x="749808" y="4069080"/>
-            <a:ext cx="4023360" cy="256032"/>
-          </a:xfrm>
-          <a:prstGeom prst="rect">
-            <a:avLst/>
-          </a:prstGeom>
-          <a:noFill/>
-        </p:spPr>
-        <p:txBody>
-          <a:bodyPr wrap="square" anchor="t">
-            <a:spAutoFit/>
-          </a:bodyPr>
-          <a:lstStyle/>
-          <a:p>
-            <a:pPr algn="l"/>
+          <a:p>
+            <a:pPr algn="l">
+              <a:spcBef>
+                <a:spcPts val="0"/>
+              </a:spcBef>
+              <a:spcAft>
+                <a:spcPts val="200"/>
+              </a:spcAft>
+            </a:pPr>
             <a:r>
               <a:rPr sz="1200" b="1">
                 <a:solidFill>
@@ -4655,33 +4575,20 @@
               <a:t>Expected result</a:t>
             </a:r>
           </a:p>
-        </p:txBody>
-      </p:sp>
-      <p:sp>
-        <p:nvSpPr>
-          <p:cNvPr id="14" name="TextBox 13"/>
-          <p:cNvSpPr txBox="1"/>
-          <p:nvPr/>
-        </p:nvSpPr>
-        <p:spPr>
-          <a:xfrm>
-            <a:off x="749808" y="4325112"/>
-            <a:ext cx="3931920" cy="566928"/>
-          </a:xfrm>
-          <a:prstGeom prst="rect">
-            <a:avLst/>
-          </a:prstGeom>
-          <a:noFill/>
-        </p:spPr>
-        <p:txBody>
-          <a:bodyPr wrap="square" anchor="t">
-            <a:spAutoFit/>
-          </a:bodyPr>
-          <a:lstStyle/>
-          <a:p>
-            <a:pPr algn="l"/>
-            <a:r>
-              <a:rPr sz="1500" b="0">
+          <a:p>
+            <a:pPr algn="l">
+              <a:lnSpc>
+                <a:spcPct val="110000"/>
+              </a:lnSpc>
+              <a:spcBef>
+                <a:spcPts val="0"/>
+              </a:spcBef>
+              <a:spcAft>
+                <a:spcPts val="800"/>
+              </a:spcAft>
+            </a:pPr>
+            <a:r>
+              <a:rPr sz="1300">
                 <a:solidFill>
                   <a:srgbClr val="102A43"/>
                 </a:solidFill>
@@ -4690,31 +4597,15 @@
               <a:t>The publisher session is established and the campaign ID is stored in the session.</a:t>
             </a:r>
           </a:p>
-        </p:txBody>
-      </p:sp>
-      <p:sp>
-        <p:nvSpPr>
-          <p:cNvPr id="15" name="TextBox 14"/>
-          <p:cNvSpPr txBox="1"/>
-          <p:nvPr/>
-        </p:nvSpPr>
-        <p:spPr>
-          <a:xfrm>
-            <a:off x="749808" y="4965192"/>
-            <a:ext cx="4023360" cy="256032"/>
-          </a:xfrm>
-          <a:prstGeom prst="rect">
-            <a:avLst/>
-          </a:prstGeom>
-          <a:noFill/>
-        </p:spPr>
-        <p:txBody>
-          <a:bodyPr wrap="square" anchor="t">
-            <a:spAutoFit/>
-          </a:bodyPr>
-          <a:lstStyle/>
-          <a:p>
-            <a:pPr algn="l"/>
+          <a:p>
+            <a:pPr algn="l">
+              <a:spcBef>
+                <a:spcPts val="0"/>
+              </a:spcBef>
+              <a:spcAft>
+                <a:spcPts val="200"/>
+              </a:spcAft>
+            </a:pPr>
             <a:r>
               <a:rPr sz="1200" b="1">
                 <a:solidFill>
@@ -4725,33 +4616,20 @@
               <a:t>Trainer note</a:t>
             </a:r>
           </a:p>
-        </p:txBody>
-      </p:sp>
-      <p:sp>
-        <p:nvSpPr>
-          <p:cNvPr id="16" name="TextBox 15"/>
-          <p:cNvSpPr txBox="1"/>
-          <p:nvPr/>
-        </p:nvSpPr>
-        <p:spPr>
-          <a:xfrm>
-            <a:off x="749808" y="5212080"/>
-            <a:ext cx="3931920" cy="640080"/>
-          </a:xfrm>
-          <a:prstGeom prst="rect">
-            <a:avLst/>
-          </a:prstGeom>
-          <a:noFill/>
-        </p:spPr>
-        <p:txBody>
-          <a:bodyPr wrap="square" anchor="t">
-            <a:spAutoFit/>
-          </a:bodyPr>
-          <a:lstStyle/>
-          <a:p>
-            <a:pPr algn="l"/>
-            <a:r>
-              <a:rPr sz="1300" b="0">
+          <a:p>
+            <a:pPr algn="l">
+              <a:lnSpc>
+                <a:spcPct val="110000"/>
+              </a:lnSpc>
+              <a:spcBef>
+                <a:spcPts val="0"/>
+              </a:spcBef>
+              <a:spcAft>
+                <a:spcPts val="0"/>
+              </a:spcAft>
+            </a:pPr>
+            <a:r>
+              <a:rPr sz="1200">
                 <a:solidFill>
                   <a:srgbClr val="52667A"/>
                 </a:solidFill>
@@ -4764,7 +4642,7 @@
       </p:sp>
       <p:sp>
         <p:nvSpPr>
-          <p:cNvPr id="17" name="Rounded Rectangle 16"/>
+          <p:cNvPr id="8" name="Rounded Rectangle 7"/>
           <p:cNvSpPr/>
           <p:nvPr/>
         </p:nvSpPr>
@@ -4809,7 +4687,7 @@
       </p:sp>
       <p:sp>
         <p:nvSpPr>
-          <p:cNvPr id="18" name="TextBox 17"/>
+          <p:cNvPr id="9" name="TextBox 8"/>
           <p:cNvSpPr txBox="1"/>
           <p:nvPr/>
         </p:nvSpPr>
@@ -4844,7 +4722,7 @@
       </p:sp>
       <p:pic>
         <p:nvPicPr>
-          <p:cNvPr id="19" name="Picture 18" descr="publisher-landing.png"/>
+          <p:cNvPr id="10" name="Picture 9" descr="publisher-landing.png"/>
           <p:cNvPicPr>
             <a:picLocks noChangeAspect="1"/>
           </p:cNvPicPr>
@@ -4868,7 +4746,7 @@
       </p:pic>
       <p:sp>
         <p:nvSpPr>
-          <p:cNvPr id="20" name="TextBox 19"/>
+          <p:cNvPr id="11" name="TextBox 10"/>
           <p:cNvSpPr txBox="1"/>
           <p:nvPr/>
         </p:nvSpPr>
@@ -4903,7 +4781,7 @@
       </p:sp>
       <p:sp>
         <p:nvSpPr>
-          <p:cNvPr id="21" name="TextBox 20"/>
+          <p:cNvPr id="12" name="TextBox 11"/>
           <p:cNvSpPr txBox="1"/>
           <p:nvPr/>
         </p:nvSpPr>
@@ -5176,7 +5054,7 @@
         <p:spPr>
           <a:xfrm>
             <a:off x="749808" y="1097280"/>
-            <a:ext cx="4023360" cy="256032"/>
+            <a:ext cx="3931920" cy="4754880"/>
           </a:xfrm>
           <a:prstGeom prst="rect">
             <a:avLst/>
@@ -5184,12 +5062,19 @@
           <a:noFill/>
         </p:spPr>
         <p:txBody>
-          <a:bodyPr wrap="square" anchor="t">
+          <a:bodyPr wrap="square" lIns="0" rIns="0" tIns="0" bIns="0">
             <a:spAutoFit/>
           </a:bodyPr>
           <a:lstStyle/>
           <a:p>
-            <a:pPr algn="l"/>
+            <a:pPr algn="l">
+              <a:spcBef>
+                <a:spcPts val="0"/>
+              </a:spcBef>
+              <a:spcAft>
+                <a:spcPts val="200"/>
+              </a:spcAft>
+            </a:pPr>
             <a:r>
               <a:rPr sz="1200" b="1">
                 <a:solidFill>
@@ -5200,33 +5085,20 @@
               <a:t>User action</a:t>
             </a:r>
           </a:p>
-        </p:txBody>
-      </p:sp>
-      <p:sp>
-        <p:nvSpPr>
-          <p:cNvPr id="8" name="TextBox 7"/>
-          <p:cNvSpPr txBox="1"/>
-          <p:nvPr/>
-        </p:nvSpPr>
-        <p:spPr>
-          <a:xfrm>
-            <a:off x="749808" y="1353312"/>
-            <a:ext cx="3931920" cy="621792"/>
-          </a:xfrm>
-          <a:prstGeom prst="rect">
-            <a:avLst/>
-          </a:prstGeom>
-          <a:noFill/>
-        </p:spPr>
-        <p:txBody>
-          <a:bodyPr wrap="square" anchor="t">
-            <a:spAutoFit/>
-          </a:bodyPr>
-          <a:lstStyle/>
-          <a:p>
-            <a:pPr algn="l"/>
-            <a:r>
-              <a:rPr sz="1600" b="0">
+          <a:p>
+            <a:pPr algn="l">
+              <a:lnSpc>
+                <a:spcPct val="110000"/>
+              </a:lnSpc>
+              <a:spcBef>
+                <a:spcPts val="0"/>
+              </a:spcBef>
+              <a:spcAft>
+                <a:spcPts val="800"/>
+              </a:spcAft>
+            </a:pPr>
+            <a:r>
+              <a:rPr sz="1200">
                 <a:solidFill>
                   <a:srgbClr val="102A43"/>
                 </a:solidFill>
@@ -5235,31 +5107,15 @@
               <a:t>Choose the add-details or edit path for the current campaign.</a:t>
             </a:r>
           </a:p>
-        </p:txBody>
-      </p:sp>
-      <p:sp>
-        <p:nvSpPr>
-          <p:cNvPr id="9" name="TextBox 8"/>
-          <p:cNvSpPr txBox="1"/>
-          <p:nvPr/>
-        </p:nvSpPr>
-        <p:spPr>
-          <a:xfrm>
-            <a:off x="749808" y="2011680"/>
-            <a:ext cx="4023360" cy="256032"/>
-          </a:xfrm>
-          <a:prstGeom prst="rect">
-            <a:avLst/>
-          </a:prstGeom>
-          <a:noFill/>
-        </p:spPr>
-        <p:txBody>
-          <a:bodyPr wrap="square" anchor="t">
-            <a:spAutoFit/>
-          </a:bodyPr>
-          <a:lstStyle/>
-          <a:p>
-            <a:pPr algn="l"/>
+          <a:p>
+            <a:pPr algn="l">
+              <a:spcBef>
+                <a:spcPts val="0"/>
+              </a:spcBef>
+              <a:spcAft>
+                <a:spcPts val="200"/>
+              </a:spcAft>
+            </a:pPr>
             <a:r>
               <a:rPr sz="1200" b="1">
                 <a:solidFill>
@@ -5270,66 +5126,37 @@
               <a:t>What appears on screen</a:t>
             </a:r>
           </a:p>
-        </p:txBody>
-      </p:sp>
-      <p:sp>
-        <p:nvSpPr>
-          <p:cNvPr id="10" name="TextBox 9"/>
-          <p:cNvSpPr txBox="1"/>
-          <p:nvPr/>
-        </p:nvSpPr>
-        <p:spPr>
-          <a:xfrm>
-            <a:off x="749808" y="2267712"/>
-            <a:ext cx="3931920" cy="713232"/>
-          </a:xfrm>
-          <a:prstGeom prst="rect">
-            <a:avLst/>
-          </a:prstGeom>
-          <a:noFill/>
-        </p:spPr>
-        <p:txBody>
-          <a:bodyPr wrap="square" anchor="t">
-            <a:spAutoFit/>
-          </a:bodyPr>
-          <a:lstStyle/>
-          <a:p>
-            <a:pPr algn="l"/>
-            <a:r>
-              <a:rPr sz="1600" b="0">
+          <a:p>
+            <a:pPr algn="l">
+              <a:lnSpc>
+                <a:spcPct val="110000"/>
+              </a:lnSpc>
+              <a:spcBef>
+                <a:spcPts val="0"/>
+              </a:spcBef>
+              <a:spcAft>
+                <a:spcPts val="800"/>
+              </a:spcAft>
+            </a:pPr>
+            <a:r>
+              <a:rPr sz="1200">
                 <a:solidFill>
                   <a:srgbClr val="102A43"/>
                 </a:solidFill>
                 <a:latin typeface="Aptos"/>
               </a:rPr>
-              <a:t>A campaign form that keeps master-system fields read-only and exposes portal-specific fields such as campaign name, dates, logos, background image, printing requirement, and status.</a:t>
-            </a:r>
-          </a:p>
-        </p:txBody>
-      </p:sp>
-      <p:sp>
-        <p:nvSpPr>
-          <p:cNvPr id="11" name="TextBox 10"/>
-          <p:cNvSpPr txBox="1"/>
-          <p:nvPr/>
-        </p:nvSpPr>
-        <p:spPr>
-          <a:xfrm>
-            <a:off x="749808" y="3063240"/>
-            <a:ext cx="4023360" cy="256032"/>
-          </a:xfrm>
-          <a:prstGeom prst="rect">
-            <a:avLst/>
-          </a:prstGeom>
-          <a:noFill/>
-        </p:spPr>
-        <p:txBody>
-          <a:bodyPr wrap="square" anchor="t">
-            <a:spAutoFit/>
-          </a:bodyPr>
-          <a:lstStyle/>
-          <a:p>
-            <a:pPr algn="l"/>
+              <a:t>A campaign form that keeps master-system fields read-only and exposes portal-specific fields such as campaign name, dates, logos, background image, printing requirement, and status, plus `Add Field Rep` and `Edit Field Rep` outbound buttons.</a:t>
+            </a:r>
+          </a:p>
+          <a:p>
+            <a:pPr algn="l">
+              <a:spcBef>
+                <a:spcPts val="0"/>
+              </a:spcBef>
+              <a:spcAft>
+                <a:spcPts val="200"/>
+              </a:spcAft>
+            </a:pPr>
             <a:r>
               <a:rPr sz="1200" b="1">
                 <a:solidFill>
@@ -5340,33 +5167,20 @@
               <a:t>Why it matters</a:t>
             </a:r>
           </a:p>
-        </p:txBody>
-      </p:sp>
-      <p:sp>
-        <p:nvSpPr>
-          <p:cNvPr id="12" name="TextBox 11"/>
-          <p:cNvSpPr txBox="1"/>
-          <p:nvPr/>
-        </p:nvSpPr>
-        <p:spPr>
-          <a:xfrm>
-            <a:off x="749808" y="3319272"/>
-            <a:ext cx="3931920" cy="640080"/>
-          </a:xfrm>
-          <a:prstGeom prst="rect">
-            <a:avLst/>
-          </a:prstGeom>
-          <a:noFill/>
-        </p:spPr>
-        <p:txBody>
-          <a:bodyPr wrap="square" anchor="t">
-            <a:spAutoFit/>
-          </a:bodyPr>
-          <a:lstStyle/>
-          <a:p>
-            <a:pPr algn="l"/>
-            <a:r>
-              <a:rPr sz="1500" b="0">
+          <a:p>
+            <a:pPr algn="l">
+              <a:lnSpc>
+                <a:spcPct val="110000"/>
+              </a:lnSpc>
+              <a:spcBef>
+                <a:spcPts val="0"/>
+              </a:spcBef>
+              <a:spcAft>
+                <a:spcPts val="800"/>
+              </a:spcAft>
+            </a:pPr>
+            <a:r>
+              <a:rPr sz="1200">
                 <a:solidFill>
                   <a:srgbClr val="102A43"/>
                 </a:solidFill>
@@ -5375,31 +5189,15 @@
               <a:t>This is the sanctioned place where the PE system adds campaign-specific presentation and timing details without mutating the master record.</a:t>
             </a:r>
           </a:p>
-        </p:txBody>
-      </p:sp>
-      <p:sp>
-        <p:nvSpPr>
-          <p:cNvPr id="13" name="TextBox 12"/>
-          <p:cNvSpPr txBox="1"/>
-          <p:nvPr/>
-        </p:nvSpPr>
-        <p:spPr>
-          <a:xfrm>
-            <a:off x="749808" y="4069080"/>
-            <a:ext cx="4023360" cy="256032"/>
-          </a:xfrm>
-          <a:prstGeom prst="rect">
-            <a:avLst/>
-          </a:prstGeom>
-          <a:noFill/>
-        </p:spPr>
-        <p:txBody>
-          <a:bodyPr wrap="square" anchor="t">
-            <a:spAutoFit/>
-          </a:bodyPr>
-          <a:lstStyle/>
-          <a:p>
-            <a:pPr algn="l"/>
+          <a:p>
+            <a:pPr algn="l">
+              <a:spcBef>
+                <a:spcPts val="0"/>
+              </a:spcBef>
+              <a:spcAft>
+                <a:spcPts val="200"/>
+              </a:spcAft>
+            </a:pPr>
             <a:r>
               <a:rPr sz="1200" b="1">
                 <a:solidFill>
@@ -5410,33 +5208,20 @@
               <a:t>Expected result</a:t>
             </a:r>
           </a:p>
-        </p:txBody>
-      </p:sp>
-      <p:sp>
-        <p:nvSpPr>
-          <p:cNvPr id="14" name="TextBox 13"/>
-          <p:cNvSpPr txBox="1"/>
-          <p:nvPr/>
-        </p:nvSpPr>
-        <p:spPr>
-          <a:xfrm>
-            <a:off x="749808" y="4325112"/>
-            <a:ext cx="3931920" cy="566928"/>
-          </a:xfrm>
-          <a:prstGeom prst="rect">
-            <a:avLst/>
-          </a:prstGeom>
-          <a:noFill/>
-        </p:spPr>
-        <p:txBody>
-          <a:bodyPr wrap="square" anchor="t">
-            <a:spAutoFit/>
-          </a:bodyPr>
-          <a:lstStyle/>
-          <a:p>
-            <a:pPr algn="l"/>
-            <a:r>
-              <a:rPr sz="1500" b="0">
+          <a:p>
+            <a:pPr algn="l">
+              <a:lnSpc>
+                <a:spcPct val="110000"/>
+              </a:lnSpc>
+              <a:spcBef>
+                <a:spcPts val="0"/>
+              </a:spcBef>
+              <a:spcAft>
+                <a:spcPts val="800"/>
+              </a:spcAft>
+            </a:pPr>
+            <a:r>
+              <a:rPr sz="1200">
                 <a:solidFill>
                   <a:srgbClr val="102A43"/>
                 </a:solidFill>
@@ -5445,31 +5230,15 @@
               <a:t>The publisher understands which information is reference-only and which is editable locally.</a:t>
             </a:r>
           </a:p>
-        </p:txBody>
-      </p:sp>
-      <p:sp>
-        <p:nvSpPr>
-          <p:cNvPr id="15" name="TextBox 14"/>
-          <p:cNvSpPr txBox="1"/>
-          <p:nvPr/>
-        </p:nvSpPr>
-        <p:spPr>
-          <a:xfrm>
-            <a:off x="749808" y="4965192"/>
-            <a:ext cx="4023360" cy="256032"/>
-          </a:xfrm>
-          <a:prstGeom prst="rect">
-            <a:avLst/>
-          </a:prstGeom>
-          <a:noFill/>
-        </p:spPr>
-        <p:txBody>
-          <a:bodyPr wrap="square" anchor="t">
-            <a:spAutoFit/>
-          </a:bodyPr>
-          <a:lstStyle/>
-          <a:p>
-            <a:pPr algn="l"/>
+          <a:p>
+            <a:pPr algn="l">
+              <a:spcBef>
+                <a:spcPts val="0"/>
+              </a:spcBef>
+              <a:spcAft>
+                <a:spcPts val="200"/>
+              </a:spcAft>
+            </a:pPr>
             <a:r>
               <a:rPr sz="1200" b="1">
                 <a:solidFill>
@@ -5480,33 +5249,20 @@
               <a:t>Trainer note</a:t>
             </a:r>
           </a:p>
-        </p:txBody>
-      </p:sp>
-      <p:sp>
-        <p:nvSpPr>
-          <p:cNvPr id="16" name="TextBox 15"/>
-          <p:cNvSpPr txBox="1"/>
-          <p:nvPr/>
-        </p:nvSpPr>
-        <p:spPr>
-          <a:xfrm>
-            <a:off x="749808" y="5212080"/>
-            <a:ext cx="3931920" cy="640080"/>
-          </a:xfrm>
-          <a:prstGeom prst="rect">
-            <a:avLst/>
-          </a:prstGeom>
-          <a:noFill/>
-        </p:spPr>
-        <p:txBody>
-          <a:bodyPr wrap="square" anchor="t">
-            <a:spAutoFit/>
-          </a:bodyPr>
-          <a:lstStyle/>
-          <a:p>
-            <a:pPr algn="l"/>
-            <a:r>
-              <a:rPr sz="1300" b="0">
+          <a:p>
+            <a:pPr algn="l">
+              <a:lnSpc>
+                <a:spcPct val="110000"/>
+              </a:lnSpc>
+              <a:spcBef>
+                <a:spcPts val="0"/>
+              </a:spcBef>
+              <a:spcAft>
+                <a:spcPts val="0"/>
+              </a:spcAft>
+            </a:pPr>
+            <a:r>
+              <a:rPr sz="1100">
                 <a:solidFill>
                   <a:srgbClr val="52667A"/>
                 </a:solidFill>
@@ -5519,7 +5275,7 @@
       </p:sp>
       <p:sp>
         <p:nvSpPr>
-          <p:cNvPr id="17" name="Rounded Rectangle 16"/>
+          <p:cNvPr id="8" name="Rounded Rectangle 7"/>
           <p:cNvSpPr/>
           <p:nvPr/>
         </p:nvSpPr>
@@ -5564,7 +5320,7 @@
       </p:sp>
       <p:sp>
         <p:nvSpPr>
-          <p:cNvPr id="18" name="TextBox 17"/>
+          <p:cNvPr id="9" name="TextBox 8"/>
           <p:cNvSpPr txBox="1"/>
           <p:nvPr/>
         </p:nvSpPr>
@@ -5599,7 +5355,7 @@
       </p:sp>
       <p:pic>
         <p:nvPicPr>
-          <p:cNvPr id="19" name="Picture 18" descr="publisher-campaign-update.png"/>
+          <p:cNvPr id="10" name="Picture 9" descr="publisher-campaign-update.png"/>
           <p:cNvPicPr>
             <a:picLocks noChangeAspect="1"/>
           </p:cNvPicPr>
@@ -5623,7 +5379,7 @@
       </p:pic>
       <p:sp>
         <p:nvSpPr>
-          <p:cNvPr id="20" name="TextBox 19"/>
+          <p:cNvPr id="11" name="TextBox 10"/>
           <p:cNvSpPr txBox="1"/>
           <p:nvPr/>
         </p:nvSpPr>
@@ -5658,7 +5414,7 @@
       </p:sp>
       <p:sp>
         <p:nvSpPr>
-          <p:cNvPr id="21" name="TextBox 20"/>
+          <p:cNvPr id="12" name="TextBox 11"/>
           <p:cNvSpPr txBox="1"/>
           <p:nvPr/>
         </p:nvSpPr>
@@ -5931,7 +5687,7 @@
         <p:spPr>
           <a:xfrm>
             <a:off x="749808" y="1097280"/>
-            <a:ext cx="4023360" cy="256032"/>
+            <a:ext cx="3931920" cy="4754880"/>
           </a:xfrm>
           <a:prstGeom prst="rect">
             <a:avLst/>
@@ -5939,12 +5695,19 @@
           <a:noFill/>
         </p:spPr>
         <p:txBody>
-          <a:bodyPr wrap="square" anchor="t">
+          <a:bodyPr wrap="square" lIns="0" rIns="0" tIns="0" bIns="0">
             <a:spAutoFit/>
           </a:bodyPr>
           <a:lstStyle/>
           <a:p>
-            <a:pPr algn="l"/>
+            <a:pPr algn="l">
+              <a:spcBef>
+                <a:spcPts val="0"/>
+              </a:spcBef>
+              <a:spcAft>
+                <a:spcPts val="200"/>
+              </a:spcAft>
+            </a:pPr>
             <a:r>
               <a:rPr sz="1200" b="1">
                 <a:solidFill>
@@ -5955,33 +5718,20 @@
               <a:t>User action</a:t>
             </a:r>
           </a:p>
-        </p:txBody>
-      </p:sp>
-      <p:sp>
-        <p:nvSpPr>
-          <p:cNvPr id="8" name="TextBox 7"/>
-          <p:cNvSpPr txBox="1"/>
-          <p:nvPr/>
-        </p:nvSpPr>
-        <p:spPr>
-          <a:xfrm>
-            <a:off x="749808" y="1353312"/>
-            <a:ext cx="3931920" cy="621792"/>
-          </a:xfrm>
-          <a:prstGeom prst="rect">
-            <a:avLst/>
-          </a:prstGeom>
-          <a:noFill/>
-        </p:spPr>
-        <p:txBody>
-          <a:bodyPr wrap="square" anchor="t">
-            <a:spAutoFit/>
-          </a:bodyPr>
-          <a:lstStyle/>
-          <a:p>
-            <a:pPr algn="l"/>
-            <a:r>
-              <a:rPr sz="1600" b="0">
+          <a:p>
+            <a:pPr algn="l">
+              <a:lnSpc>
+                <a:spcPct val="110000"/>
+              </a:lnSpc>
+              <a:spcBef>
+                <a:spcPts val="0"/>
+              </a:spcBef>
+              <a:spcAft>
+                <a:spcPts val="800"/>
+              </a:spcAft>
+            </a:pPr>
+            <a:r>
+              <a:rPr sz="1300">
                 <a:solidFill>
                   <a:srgbClr val="102A43"/>
                 </a:solidFill>
@@ -5990,31 +5740,15 @@
               <a:t>Review the campaign dates, description, logos, field-rep login background image, printing settings, and status, then save the changes.</a:t>
             </a:r>
           </a:p>
-        </p:txBody>
-      </p:sp>
-      <p:sp>
-        <p:nvSpPr>
-          <p:cNvPr id="9" name="TextBox 8"/>
-          <p:cNvSpPr txBox="1"/>
-          <p:nvPr/>
-        </p:nvSpPr>
-        <p:spPr>
-          <a:xfrm>
-            <a:off x="749808" y="2011680"/>
-            <a:ext cx="4023360" cy="256032"/>
-          </a:xfrm>
-          <a:prstGeom prst="rect">
-            <a:avLst/>
-          </a:prstGeom>
-          <a:noFill/>
-        </p:spPr>
-        <p:txBody>
-          <a:bodyPr wrap="square" anchor="t">
-            <a:spAutoFit/>
-          </a:bodyPr>
-          <a:lstStyle/>
-          <a:p>
-            <a:pPr algn="l"/>
+          <a:p>
+            <a:pPr algn="l">
+              <a:spcBef>
+                <a:spcPts val="0"/>
+              </a:spcBef>
+              <a:spcAft>
+                <a:spcPts val="200"/>
+              </a:spcAft>
+            </a:pPr>
             <a:r>
               <a:rPr sz="1200" b="1">
                 <a:solidFill>
@@ -6025,33 +5759,20 @@
               <a:t>What appears on screen</a:t>
             </a:r>
           </a:p>
-        </p:txBody>
-      </p:sp>
-      <p:sp>
-        <p:nvSpPr>
-          <p:cNvPr id="10" name="TextBox 9"/>
-          <p:cNvSpPr txBox="1"/>
-          <p:nvPr/>
-        </p:nvSpPr>
-        <p:spPr>
-          <a:xfrm>
-            <a:off x="749808" y="2267712"/>
-            <a:ext cx="3931920" cy="713232"/>
-          </a:xfrm>
-          <a:prstGeom prst="rect">
-            <a:avLst/>
-          </a:prstGeom>
-          <a:noFill/>
-        </p:spPr>
-        <p:txBody>
-          <a:bodyPr wrap="square" anchor="t">
-            <a:spAutoFit/>
-          </a:bodyPr>
-          <a:lstStyle/>
-          <a:p>
-            <a:pPr algn="l"/>
-            <a:r>
-              <a:rPr sz="1600" b="0">
+          <a:p>
+            <a:pPr algn="l">
+              <a:lnSpc>
+                <a:spcPct val="110000"/>
+              </a:lnSpc>
+              <a:spcBef>
+                <a:spcPts val="0"/>
+              </a:spcBef>
+              <a:spcAft>
+                <a:spcPts val="800"/>
+              </a:spcAft>
+            </a:pPr>
+            <a:r>
+              <a:rPr sz="1300">
                 <a:solidFill>
                   <a:srgbClr val="102A43"/>
                 </a:solidFill>
@@ -6060,31 +5781,15 @@
               <a:t>The standard Django multipart form experience with the campaign values preserved on return.</a:t>
             </a:r>
           </a:p>
-        </p:txBody>
-      </p:sp>
-      <p:sp>
-        <p:nvSpPr>
-          <p:cNvPr id="11" name="TextBox 10"/>
-          <p:cNvSpPr txBox="1"/>
-          <p:nvPr/>
-        </p:nvSpPr>
-        <p:spPr>
-          <a:xfrm>
-            <a:off x="749808" y="3063240"/>
-            <a:ext cx="4023360" cy="256032"/>
-          </a:xfrm>
-          <a:prstGeom prst="rect">
-            <a:avLst/>
-          </a:prstGeom>
-          <a:noFill/>
-        </p:spPr>
-        <p:txBody>
-          <a:bodyPr wrap="square" anchor="t">
-            <a:spAutoFit/>
-          </a:bodyPr>
-          <a:lstStyle/>
-          <a:p>
-            <a:pPr algn="l"/>
+          <a:p>
+            <a:pPr algn="l">
+              <a:spcBef>
+                <a:spcPts val="0"/>
+              </a:spcBef>
+              <a:spcAft>
+                <a:spcPts val="200"/>
+              </a:spcAft>
+            </a:pPr>
             <a:r>
               <a:rPr sz="1200" b="1">
                 <a:solidFill>
@@ -6095,33 +5800,20 @@
               <a:t>Why it matters</a:t>
             </a:r>
           </a:p>
-        </p:txBody>
-      </p:sp>
-      <p:sp>
-        <p:nvSpPr>
-          <p:cNvPr id="12" name="TextBox 11"/>
-          <p:cNvSpPr txBox="1"/>
-          <p:nvPr/>
-        </p:nvSpPr>
-        <p:spPr>
-          <a:xfrm>
-            <a:off x="749808" y="3319272"/>
-            <a:ext cx="3931920" cy="640080"/>
-          </a:xfrm>
-          <a:prstGeom prst="rect">
-            <a:avLst/>
-          </a:prstGeom>
-          <a:noFill/>
-        </p:spPr>
-        <p:txBody>
-          <a:bodyPr wrap="square" anchor="t">
-            <a:spAutoFit/>
-          </a:bodyPr>
-          <a:lstStyle/>
-          <a:p>
-            <a:pPr algn="l"/>
-            <a:r>
-              <a:rPr sz="1500" b="0">
+          <a:p>
+            <a:pPr algn="l">
+              <a:lnSpc>
+                <a:spcPct val="110000"/>
+              </a:lnSpc>
+              <a:spcBef>
+                <a:spcPts val="0"/>
+              </a:spcBef>
+              <a:spcAft>
+                <a:spcPts val="800"/>
+              </a:spcAft>
+            </a:pPr>
+            <a:r>
+              <a:rPr sz="1300">
                 <a:solidFill>
                   <a:srgbClr val="102A43"/>
                 </a:solidFill>
@@ -6130,31 +5822,15 @@
               <a:t>These fields drive the field-rep visual experience, campaign timing, and what downstream users see in the portal.</a:t>
             </a:r>
           </a:p>
-        </p:txBody>
-      </p:sp>
-      <p:sp>
-        <p:nvSpPr>
-          <p:cNvPr id="13" name="TextBox 12"/>
-          <p:cNvSpPr txBox="1"/>
-          <p:nvPr/>
-        </p:nvSpPr>
-        <p:spPr>
-          <a:xfrm>
-            <a:off x="749808" y="4069080"/>
-            <a:ext cx="4023360" cy="256032"/>
-          </a:xfrm>
-          <a:prstGeom prst="rect">
-            <a:avLst/>
-          </a:prstGeom>
-          <a:noFill/>
-        </p:spPr>
-        <p:txBody>
-          <a:bodyPr wrap="square" anchor="t">
-            <a:spAutoFit/>
-          </a:bodyPr>
-          <a:lstStyle/>
-          <a:p>
-            <a:pPr algn="l"/>
+          <a:p>
+            <a:pPr algn="l">
+              <a:spcBef>
+                <a:spcPts val="0"/>
+              </a:spcBef>
+              <a:spcAft>
+                <a:spcPts val="200"/>
+              </a:spcAft>
+            </a:pPr>
             <a:r>
               <a:rPr sz="1200" b="1">
                 <a:solidFill>
@@ -6165,33 +5841,20 @@
               <a:t>Expected result</a:t>
             </a:r>
           </a:p>
-        </p:txBody>
-      </p:sp>
-      <p:sp>
-        <p:nvSpPr>
-          <p:cNvPr id="14" name="TextBox 13"/>
-          <p:cNvSpPr txBox="1"/>
-          <p:nvPr/>
-        </p:nvSpPr>
-        <p:spPr>
-          <a:xfrm>
-            <a:off x="749808" y="4325112"/>
-            <a:ext cx="3931920" cy="566928"/>
-          </a:xfrm>
-          <a:prstGeom prst="rect">
-            <a:avLst/>
-          </a:prstGeom>
-          <a:noFill/>
-        </p:spPr>
-        <p:txBody>
-          <a:bodyPr wrap="square" anchor="t">
-            <a:spAutoFit/>
-          </a:bodyPr>
-          <a:lstStyle/>
-          <a:p>
-            <a:pPr algn="l"/>
-            <a:r>
-              <a:rPr sz="1500" b="0">
+          <a:p>
+            <a:pPr algn="l">
+              <a:lnSpc>
+                <a:spcPct val="110000"/>
+              </a:lnSpc>
+              <a:spcBef>
+                <a:spcPts val="0"/>
+              </a:spcBef>
+              <a:spcAft>
+                <a:spcPts val="800"/>
+              </a:spcAft>
+            </a:pPr>
+            <a:r>
+              <a:rPr sz="1300">
                 <a:solidFill>
                   <a:srgbClr val="102A43"/>
                 </a:solidFill>
@@ -6200,31 +5863,15 @@
               <a:t>The portal campaign record is ready for collateral setup and field-rep access.</a:t>
             </a:r>
           </a:p>
-        </p:txBody>
-      </p:sp>
-      <p:sp>
-        <p:nvSpPr>
-          <p:cNvPr id="15" name="TextBox 14"/>
-          <p:cNvSpPr txBox="1"/>
-          <p:nvPr/>
-        </p:nvSpPr>
-        <p:spPr>
-          <a:xfrm>
-            <a:off x="749808" y="4965192"/>
-            <a:ext cx="4023360" cy="256032"/>
-          </a:xfrm>
-          <a:prstGeom prst="rect">
-            <a:avLst/>
-          </a:prstGeom>
-          <a:noFill/>
-        </p:spPr>
-        <p:txBody>
-          <a:bodyPr wrap="square" anchor="t">
-            <a:spAutoFit/>
-          </a:bodyPr>
-          <a:lstStyle/>
-          <a:p>
-            <a:pPr algn="l"/>
+          <a:p>
+            <a:pPr algn="l">
+              <a:spcBef>
+                <a:spcPts val="0"/>
+              </a:spcBef>
+              <a:spcAft>
+                <a:spcPts val="200"/>
+              </a:spcAft>
+            </a:pPr>
             <a:r>
               <a:rPr sz="1200" b="1">
                 <a:solidFill>
@@ -6235,33 +5882,20 @@
               <a:t>Trainer note</a:t>
             </a:r>
           </a:p>
-        </p:txBody>
-      </p:sp>
-      <p:sp>
-        <p:nvSpPr>
-          <p:cNvPr id="16" name="TextBox 15"/>
-          <p:cNvSpPr txBox="1"/>
-          <p:nvPr/>
-        </p:nvSpPr>
-        <p:spPr>
-          <a:xfrm>
-            <a:off x="749808" y="5212080"/>
-            <a:ext cx="3931920" cy="640080"/>
-          </a:xfrm>
-          <a:prstGeom prst="rect">
-            <a:avLst/>
-          </a:prstGeom>
-          <a:noFill/>
-        </p:spPr>
-        <p:txBody>
-          <a:bodyPr wrap="square" anchor="t">
-            <a:spAutoFit/>
-          </a:bodyPr>
-          <a:lstStyle/>
-          <a:p>
-            <a:pPr algn="l"/>
-            <a:r>
-              <a:rPr sz="1300" b="0">
+          <a:p>
+            <a:pPr algn="l">
+              <a:lnSpc>
+                <a:spcPct val="110000"/>
+              </a:lnSpc>
+              <a:spcBef>
+                <a:spcPts val="0"/>
+              </a:spcBef>
+              <a:spcAft>
+                <a:spcPts val="0"/>
+              </a:spcAft>
+            </a:pPr>
+            <a:r>
+              <a:rPr sz="1200">
                 <a:solidFill>
                   <a:srgbClr val="52667A"/>
                 </a:solidFill>
@@ -6274,7 +5908,7 @@
       </p:sp>
       <p:sp>
         <p:nvSpPr>
-          <p:cNvPr id="17" name="Rounded Rectangle 16"/>
+          <p:cNvPr id="8" name="Rounded Rectangle 7"/>
           <p:cNvSpPr/>
           <p:nvPr/>
         </p:nvSpPr>
@@ -6319,7 +5953,7 @@
       </p:sp>
       <p:sp>
         <p:nvSpPr>
-          <p:cNvPr id="18" name="TextBox 17"/>
+          <p:cNvPr id="9" name="TextBox 8"/>
           <p:cNvSpPr txBox="1"/>
           <p:nvPr/>
         </p:nvSpPr>
@@ -6354,7 +5988,7 @@
       </p:sp>
       <p:pic>
         <p:nvPicPr>
-          <p:cNvPr id="19" name="Picture 18" descr="publisher-campaign-update.png"/>
+          <p:cNvPr id="10" name="Picture 9" descr="publisher-campaign-update.png"/>
           <p:cNvPicPr>
             <a:picLocks noChangeAspect="1"/>
           </p:cNvPicPr>
@@ -6378,7 +6012,7 @@
       </p:pic>
       <p:sp>
         <p:nvSpPr>
-          <p:cNvPr id="20" name="TextBox 19"/>
+          <p:cNvPr id="11" name="TextBox 10"/>
           <p:cNvSpPr txBox="1"/>
           <p:nvPr/>
         </p:nvSpPr>
@@ -6413,7 +6047,7 @@
       </p:sp>
       <p:sp>
         <p:nvSpPr>
-          <p:cNvPr id="21" name="TextBox 20"/>
+          <p:cNvPr id="12" name="TextBox 11"/>
           <p:cNvSpPr txBox="1"/>
           <p:nvPr/>
         </p:nvSpPr>
@@ -6686,7 +6320,7 @@
         <p:spPr>
           <a:xfrm>
             <a:off x="749808" y="1097280"/>
-            <a:ext cx="4023360" cy="256032"/>
+            <a:ext cx="3931920" cy="4754880"/>
           </a:xfrm>
           <a:prstGeom prst="rect">
             <a:avLst/>
@@ -6694,12 +6328,19 @@
           <a:noFill/>
         </p:spPr>
         <p:txBody>
-          <a:bodyPr wrap="square" anchor="t">
+          <a:bodyPr wrap="square" lIns="0" rIns="0" tIns="0" bIns="0">
             <a:spAutoFit/>
           </a:bodyPr>
           <a:lstStyle/>
           <a:p>
-            <a:pPr algn="l"/>
+            <a:pPr algn="l">
+              <a:spcBef>
+                <a:spcPts val="0"/>
+              </a:spcBef>
+              <a:spcAft>
+                <a:spcPts val="200"/>
+              </a:spcAft>
+            </a:pPr>
             <a:r>
               <a:rPr sz="1200" b="1">
                 <a:solidFill>
@@ -6710,33 +6351,20 @@
               <a:t>User action</a:t>
             </a:r>
           </a:p>
-        </p:txBody>
-      </p:sp>
-      <p:sp>
-        <p:nvSpPr>
-          <p:cNvPr id="8" name="TextBox 7"/>
-          <p:cNvSpPr txBox="1"/>
-          <p:nvPr/>
-        </p:nvSpPr>
-        <p:spPr>
-          <a:xfrm>
-            <a:off x="749808" y="1353312"/>
-            <a:ext cx="3931920" cy="621792"/>
-          </a:xfrm>
-          <a:prstGeom prst="rect">
-            <a:avLst/>
-          </a:prstGeom>
-          <a:noFill/>
-        </p:spPr>
-        <p:txBody>
-          <a:bodyPr wrap="square" anchor="t">
-            <a:spAutoFit/>
-          </a:bodyPr>
-          <a:lstStyle/>
-          <a:p>
-            <a:pPr algn="l"/>
-            <a:r>
-              <a:rPr sz="1600" b="0">
+          <a:p>
+            <a:pPr algn="l">
+              <a:lnSpc>
+                <a:spcPct val="110000"/>
+              </a:lnSpc>
+              <a:spcBef>
+                <a:spcPts val="0"/>
+              </a:spcBef>
+              <a:spcAft>
+                <a:spcPts val="800"/>
+              </a:spcAft>
+            </a:pPr>
+            <a:r>
+              <a:rPr sz="1200">
                 <a:solidFill>
                   <a:srgbClr val="102A43"/>
                 </a:solidFill>
@@ -6745,31 +6373,15 @@
               <a:t>After saving, hand the campaign over to the operator or internal team responsible for collaterals and field reps.</a:t>
             </a:r>
           </a:p>
-        </p:txBody>
-      </p:sp>
-      <p:sp>
-        <p:nvSpPr>
-          <p:cNvPr id="9" name="TextBox 8"/>
-          <p:cNvSpPr txBox="1"/>
-          <p:nvPr/>
-        </p:nvSpPr>
-        <p:spPr>
-          <a:xfrm>
-            <a:off x="749808" y="2011680"/>
-            <a:ext cx="4023360" cy="256032"/>
-          </a:xfrm>
-          <a:prstGeom prst="rect">
-            <a:avLst/>
-          </a:prstGeom>
-          <a:noFill/>
-        </p:spPr>
-        <p:txBody>
-          <a:bodyPr wrap="square" anchor="t">
-            <a:spAutoFit/>
-          </a:bodyPr>
-          <a:lstStyle/>
-          <a:p>
-            <a:pPr algn="l"/>
+          <a:p>
+            <a:pPr algn="l">
+              <a:spcBef>
+                <a:spcPts val="0"/>
+              </a:spcBef>
+              <a:spcAft>
+                <a:spcPts val="200"/>
+              </a:spcAft>
+            </a:pPr>
             <a:r>
               <a:rPr sz="1200" b="1">
                 <a:solidFill>
@@ -6780,33 +6392,20 @@
               <a:t>What appears on screen</a:t>
             </a:r>
           </a:p>
-        </p:txBody>
-      </p:sp>
-      <p:sp>
-        <p:nvSpPr>
-          <p:cNvPr id="10" name="TextBox 9"/>
-          <p:cNvSpPr txBox="1"/>
-          <p:nvPr/>
-        </p:nvSpPr>
-        <p:spPr>
-          <a:xfrm>
-            <a:off x="749808" y="2267712"/>
-            <a:ext cx="3931920" cy="713232"/>
-          </a:xfrm>
-          <a:prstGeom prst="rect">
-            <a:avLst/>
-          </a:prstGeom>
-          <a:noFill/>
-        </p:spPr>
-        <p:txBody>
-          <a:bodyPr wrap="square" anchor="t">
-            <a:spAutoFit/>
-          </a:bodyPr>
-          <a:lstStyle/>
-          <a:p>
-            <a:pPr algn="l"/>
-            <a:r>
-              <a:rPr sz="1600" b="0">
+          <a:p>
+            <a:pPr algn="l">
+              <a:lnSpc>
+                <a:spcPct val="110000"/>
+              </a:lnSpc>
+              <a:spcBef>
+                <a:spcPts val="0"/>
+              </a:spcBef>
+              <a:spcAft>
+                <a:spcPts val="800"/>
+              </a:spcAft>
+            </a:pPr>
+            <a:r>
+              <a:rPr sz="1200">
                 <a:solidFill>
                   <a:srgbClr val="102A43"/>
                 </a:solidFill>
@@ -6815,31 +6414,15 @@
               <a:t>The refreshed campaign update page, which now represents the latest local state for that campaign.</a:t>
             </a:r>
           </a:p>
-        </p:txBody>
-      </p:sp>
-      <p:sp>
-        <p:nvSpPr>
-          <p:cNvPr id="11" name="TextBox 10"/>
-          <p:cNvSpPr txBox="1"/>
-          <p:nvPr/>
-        </p:nvSpPr>
-        <p:spPr>
-          <a:xfrm>
-            <a:off x="749808" y="3063240"/>
-            <a:ext cx="4023360" cy="256032"/>
-          </a:xfrm>
-          <a:prstGeom prst="rect">
-            <a:avLst/>
-          </a:prstGeom>
-          <a:noFill/>
-        </p:spPr>
-        <p:txBody>
-          <a:bodyPr wrap="square" anchor="t">
-            <a:spAutoFit/>
-          </a:bodyPr>
-          <a:lstStyle/>
-          <a:p>
-            <a:pPr algn="l"/>
+          <a:p>
+            <a:pPr algn="l">
+              <a:spcBef>
+                <a:spcPts val="0"/>
+              </a:spcBef>
+              <a:spcAft>
+                <a:spcPts val="200"/>
+              </a:spcAft>
+            </a:pPr>
             <a:r>
               <a:rPr sz="1200" b="1">
                 <a:solidFill>
@@ -6850,33 +6433,20 @@
               <a:t>Why it matters</a:t>
             </a:r>
           </a:p>
-        </p:txBody>
-      </p:sp>
-      <p:sp>
-        <p:nvSpPr>
-          <p:cNvPr id="12" name="TextBox 11"/>
-          <p:cNvSpPr txBox="1"/>
-          <p:nvPr/>
-        </p:nvSpPr>
-        <p:spPr>
-          <a:xfrm>
-            <a:off x="749808" y="3319272"/>
-            <a:ext cx="3931920" cy="640080"/>
-          </a:xfrm>
-          <a:prstGeom prst="rect">
-            <a:avLst/>
-          </a:prstGeom>
-          <a:noFill/>
-        </p:spPr>
-        <p:txBody>
-          <a:bodyPr wrap="square" anchor="t">
-            <a:spAutoFit/>
-          </a:bodyPr>
-          <a:lstStyle/>
-          <a:p>
-            <a:pPr algn="l"/>
-            <a:r>
-              <a:rPr sz="1500" b="0">
+          <a:p>
+            <a:pPr algn="l">
+              <a:lnSpc>
+                <a:spcPct val="110000"/>
+              </a:lnSpc>
+              <a:spcBef>
+                <a:spcPts val="0"/>
+              </a:spcBef>
+              <a:spcAft>
+                <a:spcPts val="800"/>
+              </a:spcAft>
+            </a:pPr>
+            <a:r>
+              <a:rPr sz="1200">
                 <a:solidFill>
                   <a:srgbClr val="102A43"/>
                 </a:solidFill>
@@ -6885,31 +6455,15 @@
               <a:t>Publisher onboarding is the start of the lifecycle, not the end. The downstream team still needs campaign context to assign reps and publish assets.</a:t>
             </a:r>
           </a:p>
-        </p:txBody>
-      </p:sp>
-      <p:sp>
-        <p:nvSpPr>
-          <p:cNvPr id="13" name="TextBox 12"/>
-          <p:cNvSpPr txBox="1"/>
-          <p:nvPr/>
-        </p:nvSpPr>
-        <p:spPr>
-          <a:xfrm>
-            <a:off x="749808" y="4069080"/>
-            <a:ext cx="4023360" cy="256032"/>
-          </a:xfrm>
-          <a:prstGeom prst="rect">
-            <a:avLst/>
-          </a:prstGeom>
-          <a:noFill/>
-        </p:spPr>
-        <p:txBody>
-          <a:bodyPr wrap="square" anchor="t">
-            <a:spAutoFit/>
-          </a:bodyPr>
-          <a:lstStyle/>
-          <a:p>
-            <a:pPr algn="l"/>
+          <a:p>
+            <a:pPr algn="l">
+              <a:spcBef>
+                <a:spcPts val="0"/>
+              </a:spcBef>
+              <a:spcAft>
+                <a:spcPts val="200"/>
+              </a:spcAft>
+            </a:pPr>
             <a:r>
               <a:rPr sz="1200" b="1">
                 <a:solidFill>
@@ -6920,33 +6474,20 @@
               <a:t>Expected result</a:t>
             </a:r>
           </a:p>
-        </p:txBody>
-      </p:sp>
-      <p:sp>
-        <p:nvSpPr>
-          <p:cNvPr id="14" name="TextBox 13"/>
-          <p:cNvSpPr txBox="1"/>
-          <p:nvPr/>
-        </p:nvSpPr>
-        <p:spPr>
-          <a:xfrm>
-            <a:off x="749808" y="4325112"/>
-            <a:ext cx="3931920" cy="566928"/>
-          </a:xfrm>
-          <a:prstGeom prst="rect">
-            <a:avLst/>
-          </a:prstGeom>
-          <a:noFill/>
-        </p:spPr>
-        <p:txBody>
-          <a:bodyPr wrap="square" anchor="t">
-            <a:spAutoFit/>
-          </a:bodyPr>
-          <a:lstStyle/>
-          <a:p>
-            <a:pPr algn="l"/>
-            <a:r>
-              <a:rPr sz="1500" b="0">
+          <a:p>
+            <a:pPr algn="l">
+              <a:lnSpc>
+                <a:spcPct val="110000"/>
+              </a:lnSpc>
+              <a:spcBef>
+                <a:spcPts val="0"/>
+              </a:spcBef>
+              <a:spcAft>
+                <a:spcPts val="800"/>
+              </a:spcAft>
+            </a:pPr>
+            <a:r>
+              <a:rPr sz="1200">
                 <a:solidFill>
                   <a:srgbClr val="102A43"/>
                 </a:solidFill>
@@ -6955,31 +6496,15 @@
               <a:t>The campaign is ready for staff-level operations and field-rep activation.</a:t>
             </a:r>
           </a:p>
-        </p:txBody>
-      </p:sp>
-      <p:sp>
-        <p:nvSpPr>
-          <p:cNvPr id="15" name="TextBox 14"/>
-          <p:cNvSpPr txBox="1"/>
-          <p:nvPr/>
-        </p:nvSpPr>
-        <p:spPr>
-          <a:xfrm>
-            <a:off x="749808" y="4965192"/>
-            <a:ext cx="4023360" cy="256032"/>
-          </a:xfrm>
-          <a:prstGeom prst="rect">
-            <a:avLst/>
-          </a:prstGeom>
-          <a:noFill/>
-        </p:spPr>
-        <p:txBody>
-          <a:bodyPr wrap="square" anchor="t">
-            <a:spAutoFit/>
-          </a:bodyPr>
-          <a:lstStyle/>
-          <a:p>
-            <a:pPr algn="l"/>
+          <a:p>
+            <a:pPr algn="l">
+              <a:spcBef>
+                <a:spcPts val="0"/>
+              </a:spcBef>
+              <a:spcAft>
+                <a:spcPts val="200"/>
+              </a:spcAft>
+            </a:pPr>
             <a:r>
               <a:rPr sz="1200" b="1">
                 <a:solidFill>
@@ -6990,33 +6515,20 @@
               <a:t>Trainer note</a:t>
             </a:r>
           </a:p>
-        </p:txBody>
-      </p:sp>
-      <p:sp>
-        <p:nvSpPr>
-          <p:cNvPr id="16" name="TextBox 15"/>
-          <p:cNvSpPr txBox="1"/>
-          <p:nvPr/>
-        </p:nvSpPr>
-        <p:spPr>
-          <a:xfrm>
-            <a:off x="749808" y="5212080"/>
-            <a:ext cx="3931920" cy="640080"/>
-          </a:xfrm>
-          <a:prstGeom prst="rect">
-            <a:avLst/>
-          </a:prstGeom>
-          <a:noFill/>
-        </p:spPr>
-        <p:txBody>
-          <a:bodyPr wrap="square" anchor="t">
-            <a:spAutoFit/>
-          </a:bodyPr>
-          <a:lstStyle/>
-          <a:p>
-            <a:pPr algn="l"/>
-            <a:r>
-              <a:rPr sz="1300" b="0">
+          <a:p>
+            <a:pPr algn="l">
+              <a:lnSpc>
+                <a:spcPct val="110000"/>
+              </a:lnSpc>
+              <a:spcBef>
+                <a:spcPts val="0"/>
+              </a:spcBef>
+              <a:spcAft>
+                <a:spcPts val="0"/>
+              </a:spcAft>
+            </a:pPr>
+            <a:r>
+              <a:rPr sz="1100">
                 <a:solidFill>
                   <a:srgbClr val="52667A"/>
                 </a:solidFill>
@@ -7029,7 +6541,7 @@
       </p:sp>
       <p:sp>
         <p:nvSpPr>
-          <p:cNvPr id="17" name="Rounded Rectangle 16"/>
+          <p:cNvPr id="8" name="Rounded Rectangle 7"/>
           <p:cNvSpPr/>
           <p:nvPr/>
         </p:nvSpPr>
@@ -7074,7 +6586,7 @@
       </p:sp>
       <p:sp>
         <p:nvSpPr>
-          <p:cNvPr id="18" name="TextBox 17"/>
+          <p:cNvPr id="9" name="TextBox 8"/>
           <p:cNvSpPr txBox="1"/>
           <p:nvPr/>
         </p:nvSpPr>
@@ -7109,7 +6621,7 @@
       </p:sp>
       <p:pic>
         <p:nvPicPr>
-          <p:cNvPr id="19" name="Picture 18" descr="publisher-campaign-update.png"/>
+          <p:cNvPr id="10" name="Picture 9" descr="publisher-campaign-update.png"/>
           <p:cNvPicPr>
             <a:picLocks noChangeAspect="1"/>
           </p:cNvPicPr>
@@ -7133,7 +6645,7 @@
       </p:pic>
       <p:sp>
         <p:nvSpPr>
-          <p:cNvPr id="20" name="TextBox 19"/>
+          <p:cNvPr id="11" name="TextBox 10"/>
           <p:cNvSpPr txBox="1"/>
           <p:nvPr/>
         </p:nvSpPr>
@@ -7168,7 +6680,7 @@
       </p:sp>
       <p:sp>
         <p:nvSpPr>
-          <p:cNvPr id="21" name="TextBox 20"/>
+          <p:cNvPr id="12" name="TextBox 11"/>
           <p:cNvSpPr txBox="1"/>
           <p:nvPr/>
         </p:nvSpPr>
@@ -7579,7 +7091,7 @@
                 </a:solidFill>
                 <a:latin typeface="Aptos"/>
               </a:rPr>
-              <a:t>Validated against the signed publisher demo route on 2026-04-11.</a:t>
+              <a:t>Validated against the signed publisher demo route on 2026-04-23.</a:t>
             </a:r>
           </a:p>
         </p:txBody>
@@ -7873,7 +7385,7 @@
                 </a:solidFill>
                 <a:latin typeface="Aptos"/>
               </a:rPr>
-              <a:t>Validated against the signed publisher demo route on 2026-04-11.</a:t>
+              <a:t>Validated against the signed publisher demo route on 2026-04-23.</a:t>
             </a:r>
           </a:p>
         </p:txBody>
